--- a/mignon-avvento/export/tavole-post-1080x1350.pptx
+++ b/mignon-avvento/export/tavole-post-1080x1350.pptx
@@ -3141,7 +3141,7 @@
       </p:sp>
       <p:pic>
         <p:nvPicPr>
-          <p:cNvPr id="3" name="Picture 2" descr="logo-chiaro.png"/>
+          <p:cNvPr id="3" name="Picture 2" descr="bottiglie.png"/>
           <p:cNvPicPr>
             <a:picLocks noChangeAspect="1"/>
           </p:cNvPicPr>
@@ -3155,8 +3155,8 @@
         </p:blipFill>
         <p:spPr>
           <a:xfrm>
-            <a:off x="685800" y="685800"/>
-            <a:ext cx="1562100" cy="1333500"/>
+            <a:off x="685800" y="628650"/>
+            <a:ext cx="904875" cy="1066800"/>
           </a:xfrm>
           <a:prstGeom prst="rect">
             <a:avLst/>
@@ -3166,6 +3166,84 @@
       <p:sp>
         <p:nvSpPr>
           <p:cNvPr id="4" name="TextBox 3"/>
+          <p:cNvSpPr txBox="1"/>
+          <p:nvPr/>
+        </p:nvSpPr>
+        <p:spPr>
+          <a:xfrm>
+            <a:off x="685800" y="1838325"/>
+            <a:ext cx="2366010" cy="360045"/>
+          </a:xfrm>
+          <a:prstGeom prst="rect">
+            <a:avLst/>
+          </a:prstGeom>
+          <a:noFill/>
+        </p:spPr>
+        <p:txBody>
+          <a:bodyPr wrap="square" lIns="0" rIns="0" tIns="0" bIns="0" anchor="t">
+            <a:spAutoFit/>
+          </a:bodyPr>
+          <a:lstStyle/>
+          <a:p>
+            <a:pPr algn="l">
+              <a:lnSpc>
+                <a:spcPct val="105000"/>
+              </a:lnSpc>
+            </a:pPr>
+            <a:r>
+              <a:rPr sz="2025" b="1" i="0">
+                <a:solidFill>
+                  <a:srgbClr val="F3ECE2"/>
+                </a:solidFill>
+                <a:latin typeface="Montserrat"/>
+              </a:rPr>
+              <a:t>Mignon Experience</a:t>
+            </a:r>
+          </a:p>
+        </p:txBody>
+      </p:sp>
+      <p:sp>
+        <p:nvSpPr>
+          <p:cNvPr id="5" name="TextBox 4"/>
+          <p:cNvSpPr txBox="1"/>
+          <p:nvPr/>
+        </p:nvSpPr>
+        <p:spPr>
+          <a:xfrm>
+            <a:off x="685800" y="2185511"/>
+            <a:ext cx="2366010" cy="209550"/>
+          </a:xfrm>
+          <a:prstGeom prst="rect">
+            <a:avLst/>
+          </a:prstGeom>
+          <a:noFill/>
+        </p:spPr>
+        <p:txBody>
+          <a:bodyPr wrap="square" lIns="0" rIns="0" tIns="0" bIns="0" anchor="t">
+            <a:spAutoFit/>
+          </a:bodyPr>
+          <a:lstStyle/>
+          <a:p>
+            <a:pPr algn="l">
+              <a:lnSpc>
+                <a:spcPct val="125000"/>
+              </a:lnSpc>
+            </a:pPr>
+            <a:r>
+              <a:rPr sz="825" b="0" i="0" spc="247">
+                <a:solidFill>
+                  <a:srgbClr val="A2968A"/>
+                </a:solidFill>
+                <a:latin typeface="Montserrat"/>
+              </a:rPr>
+              <a:t>LE PIÙ PICCOLE</a:t>
+            </a:r>
+          </a:p>
+        </p:txBody>
+      </p:sp>
+      <p:sp>
+        <p:nvSpPr>
+          <p:cNvPr id="6" name="TextBox 5"/>
           <p:cNvSpPr txBox="1"/>
           <p:nvPr/>
         </p:nvSpPr>
@@ -3220,7 +3298,7 @@
       </p:sp>
       <p:sp>
         <p:nvSpPr>
-          <p:cNvPr id="5" name="TextBox 4"/>
+          <p:cNvPr id="7" name="TextBox 6"/>
           <p:cNvSpPr txBox="1"/>
           <p:nvPr/>
         </p:nvSpPr>
@@ -3259,7 +3337,7 @@
       </p:sp>
       <p:sp>
         <p:nvSpPr>
-          <p:cNvPr id="6" name="TextBox 5"/>
+          <p:cNvPr id="8" name="TextBox 7"/>
           <p:cNvSpPr txBox="1"/>
           <p:nvPr/>
         </p:nvSpPr>
@@ -3323,7 +3401,7 @@
       </p:sp>
       <p:sp>
         <p:nvSpPr>
-          <p:cNvPr id="7" name="Rectangle 6"/>
+          <p:cNvPr id="9" name="Rectangle 8"/>
           <p:cNvSpPr/>
           <p:nvPr/>
         </p:nvSpPr>
@@ -3367,7 +3445,7 @@
       </p:sp>
       <p:sp>
         <p:nvSpPr>
-          <p:cNvPr id="8" name="TextBox 7"/>
+          <p:cNvPr id="10" name="TextBox 9"/>
           <p:cNvSpPr txBox="1"/>
           <p:nvPr/>
         </p:nvSpPr>
@@ -3406,7 +3484,7 @@
       </p:sp>
       <p:sp>
         <p:nvSpPr>
-          <p:cNvPr id="9" name="Rectangle 8"/>
+          <p:cNvPr id="11" name="Rectangle 10"/>
           <p:cNvSpPr/>
           <p:nvPr/>
         </p:nvSpPr>
@@ -3450,7 +3528,7 @@
       </p:sp>
       <p:sp>
         <p:nvSpPr>
-          <p:cNvPr id="10" name="TextBox 9"/>
+          <p:cNvPr id="12" name="TextBox 11"/>
           <p:cNvSpPr txBox="1"/>
           <p:nvPr/>
         </p:nvSpPr>
@@ -3489,7 +3567,7 @@
       </p:sp>
       <p:sp>
         <p:nvSpPr>
-          <p:cNvPr id="11" name="TextBox 10"/>
+          <p:cNvPr id="13" name="TextBox 12"/>
           <p:cNvSpPr txBox="1"/>
           <p:nvPr/>
         </p:nvSpPr>
@@ -3544,7 +3622,7 @@
       </p:sp>
       <p:sp>
         <p:nvSpPr>
-          <p:cNvPr id="12" name="Rectangle 11"/>
+          <p:cNvPr id="14" name="Rectangle 13"/>
           <p:cNvSpPr/>
           <p:nvPr/>
         </p:nvSpPr>
@@ -3588,7 +3666,7 @@
       </p:sp>
       <p:sp>
         <p:nvSpPr>
-          <p:cNvPr id="13" name="TextBox 12"/>
+          <p:cNvPr id="15" name="TextBox 14"/>
           <p:cNvSpPr txBox="1"/>
           <p:nvPr/>
         </p:nvSpPr>
@@ -3627,7 +3705,7 @@
       </p:sp>
       <p:sp>
         <p:nvSpPr>
-          <p:cNvPr id="14" name="TextBox 13"/>
+          <p:cNvPr id="16" name="TextBox 15"/>
           <p:cNvSpPr txBox="1"/>
           <p:nvPr/>
         </p:nvSpPr>
@@ -3682,7 +3760,7 @@
       </p:sp>
       <p:sp>
         <p:nvSpPr>
-          <p:cNvPr id="15" name="Rectangle 14"/>
+          <p:cNvPr id="17" name="Rectangle 16"/>
           <p:cNvSpPr/>
           <p:nvPr/>
         </p:nvSpPr>
@@ -3726,7 +3804,7 @@
       </p:sp>
       <p:sp>
         <p:nvSpPr>
-          <p:cNvPr id="16" name="TextBox 15"/>
+          <p:cNvPr id="18" name="TextBox 17"/>
           <p:cNvSpPr txBox="1"/>
           <p:nvPr/>
         </p:nvSpPr>
@@ -3765,7 +3843,7 @@
       </p:sp>
       <p:sp>
         <p:nvSpPr>
-          <p:cNvPr id="17" name="TextBox 16"/>
+          <p:cNvPr id="19" name="TextBox 18"/>
           <p:cNvSpPr txBox="1"/>
           <p:nvPr/>
         </p:nvSpPr>
@@ -3820,7 +3898,7 @@
       </p:sp>
       <p:sp>
         <p:nvSpPr>
-          <p:cNvPr id="18" name="Rectangle 17"/>
+          <p:cNvPr id="20" name="Rectangle 19"/>
           <p:cNvSpPr/>
           <p:nvPr/>
         </p:nvSpPr>
@@ -3864,7 +3942,7 @@
       </p:sp>
       <p:sp>
         <p:nvSpPr>
-          <p:cNvPr id="19" name="TextBox 18"/>
+          <p:cNvPr id="21" name="TextBox 20"/>
           <p:cNvSpPr txBox="1"/>
           <p:nvPr/>
         </p:nvSpPr>
@@ -3903,7 +3981,7 @@
       </p:sp>
       <p:sp>
         <p:nvSpPr>
-          <p:cNvPr id="20" name="TextBox 19"/>
+          <p:cNvPr id="22" name="TextBox 21"/>
           <p:cNvSpPr txBox="1"/>
           <p:nvPr/>
         </p:nvSpPr>
@@ -3958,7 +4036,7 @@
       </p:sp>
       <p:sp>
         <p:nvSpPr>
-          <p:cNvPr id="21" name="TextBox 20"/>
+          <p:cNvPr id="23" name="TextBox 22"/>
           <p:cNvSpPr txBox="1"/>
           <p:nvPr/>
         </p:nvSpPr>
@@ -3997,7 +4075,7 @@
       </p:sp>
       <p:sp>
         <p:nvSpPr>
-          <p:cNvPr id="22" name="TextBox 21"/>
+          <p:cNvPr id="24" name="TextBox 23"/>
           <p:cNvSpPr txBox="1"/>
           <p:nvPr/>
         </p:nvSpPr>
@@ -4098,7 +4176,7 @@
       </p:sp>
       <p:pic>
         <p:nvPicPr>
-          <p:cNvPr id="3" name="Picture 2" descr="logo.png"/>
+          <p:cNvPr id="3" name="Picture 2" descr="bottiglie.png"/>
           <p:cNvPicPr>
             <a:picLocks noChangeAspect="1"/>
           </p:cNvPicPr>
@@ -4112,8 +4190,8 @@
         </p:blipFill>
         <p:spPr>
           <a:xfrm>
-            <a:off x="533400" y="533400"/>
-            <a:ext cx="1162050" cy="990600"/>
+            <a:off x="533400" y="476250"/>
+            <a:ext cx="704850" cy="838200"/>
           </a:xfrm>
           <a:prstGeom prst="rect">
             <a:avLst/>
@@ -4123,6 +4201,84 @@
       <p:sp>
         <p:nvSpPr>
           <p:cNvPr id="4" name="TextBox 3"/>
+          <p:cNvSpPr txBox="1"/>
+          <p:nvPr/>
+        </p:nvSpPr>
+        <p:spPr>
+          <a:xfrm>
+            <a:off x="533400" y="1419225"/>
+            <a:ext cx="1840230" cy="280035"/>
+          </a:xfrm>
+          <a:prstGeom prst="rect">
+            <a:avLst/>
+          </a:prstGeom>
+          <a:noFill/>
+        </p:spPr>
+        <p:txBody>
+          <a:bodyPr wrap="square" lIns="0" rIns="0" tIns="0" bIns="0" anchor="t">
+            <a:spAutoFit/>
+          </a:bodyPr>
+          <a:lstStyle/>
+          <a:p>
+            <a:pPr algn="l">
+              <a:lnSpc>
+                <a:spcPct val="105000"/>
+              </a:lnSpc>
+            </a:pPr>
+            <a:r>
+              <a:rPr sz="1575" b="1" i="0">
+                <a:solidFill>
+                  <a:srgbClr val="4A4A52"/>
+                </a:solidFill>
+                <a:latin typeface="Montserrat"/>
+              </a:rPr>
+              <a:t>Mignon Experience</a:t>
+            </a:r>
+          </a:p>
+        </p:txBody>
+      </p:sp>
+      <p:sp>
+        <p:nvSpPr>
+          <p:cNvPr id="5" name="TextBox 4"/>
+          <p:cNvSpPr txBox="1"/>
+          <p:nvPr/>
+        </p:nvSpPr>
+        <p:spPr>
+          <a:xfrm>
+            <a:off x="533400" y="1689258"/>
+            <a:ext cx="1840230" cy="171450"/>
+          </a:xfrm>
+          <a:prstGeom prst="rect">
+            <a:avLst/>
+          </a:prstGeom>
+          <a:noFill/>
+        </p:spPr>
+        <p:txBody>
+          <a:bodyPr wrap="square" lIns="0" rIns="0" tIns="0" bIns="0" anchor="t">
+            <a:spAutoFit/>
+          </a:bodyPr>
+          <a:lstStyle/>
+          <a:p>
+            <a:pPr algn="l">
+              <a:lnSpc>
+                <a:spcPct val="125000"/>
+              </a:lnSpc>
+            </a:pPr>
+            <a:r>
+              <a:rPr sz="675" b="0" i="0" spc="202">
+                <a:solidFill>
+                  <a:srgbClr val="8A8A92"/>
+                </a:solidFill>
+                <a:latin typeface="Montserrat"/>
+              </a:rPr>
+              <a:t>LE PIÙ PICCOLE</a:t>
+            </a:r>
+          </a:p>
+        </p:txBody>
+      </p:sp>
+      <p:sp>
+        <p:nvSpPr>
+          <p:cNvPr id="6" name="TextBox 5"/>
           <p:cNvSpPr txBox="1"/>
           <p:nvPr/>
         </p:nvSpPr>
@@ -4177,7 +4333,7 @@
       </p:sp>
       <p:sp>
         <p:nvSpPr>
-          <p:cNvPr id="5" name="TextBox 4"/>
+          <p:cNvPr id="7" name="TextBox 6"/>
           <p:cNvSpPr txBox="1"/>
           <p:nvPr/>
         </p:nvSpPr>
@@ -4266,7 +4422,7 @@
       </p:sp>
       <p:sp>
         <p:nvSpPr>
-          <p:cNvPr id="6" name="TextBox 5"/>
+          <p:cNvPr id="8" name="TextBox 7"/>
           <p:cNvSpPr txBox="1"/>
           <p:nvPr/>
         </p:nvSpPr>
@@ -4305,7 +4461,7 @@
       </p:sp>
       <p:sp>
         <p:nvSpPr>
-          <p:cNvPr id="7" name="Rectangle 6"/>
+          <p:cNvPr id="9" name="Rectangle 8"/>
           <p:cNvSpPr/>
           <p:nvPr/>
         </p:nvSpPr>
@@ -4349,7 +4505,7 @@
       </p:sp>
       <p:sp>
         <p:nvSpPr>
-          <p:cNvPr id="8" name="TextBox 7"/>
+          <p:cNvPr id="10" name="TextBox 9"/>
           <p:cNvSpPr txBox="1"/>
           <p:nvPr/>
         </p:nvSpPr>
@@ -4388,7 +4544,7 @@
       </p:sp>
       <p:sp>
         <p:nvSpPr>
-          <p:cNvPr id="9" name="Rectangle 8"/>
+          <p:cNvPr id="11" name="Rectangle 10"/>
           <p:cNvSpPr/>
           <p:nvPr/>
         </p:nvSpPr>
@@ -4432,7 +4588,7 @@
       </p:sp>
       <p:sp>
         <p:nvSpPr>
-          <p:cNvPr id="10" name="TextBox 9"/>
+          <p:cNvPr id="12" name="TextBox 11"/>
           <p:cNvSpPr txBox="1"/>
           <p:nvPr/>
         </p:nvSpPr>
@@ -4471,7 +4627,7 @@
       </p:sp>
       <p:sp>
         <p:nvSpPr>
-          <p:cNvPr id="11" name="Rectangle 10"/>
+          <p:cNvPr id="13" name="Rectangle 12"/>
           <p:cNvSpPr/>
           <p:nvPr/>
         </p:nvSpPr>
@@ -4515,7 +4671,7 @@
       </p:sp>
       <p:sp>
         <p:nvSpPr>
-          <p:cNvPr id="12" name="TextBox 11"/>
+          <p:cNvPr id="14" name="TextBox 13"/>
           <p:cNvSpPr txBox="1"/>
           <p:nvPr/>
         </p:nvSpPr>
@@ -4554,7 +4710,7 @@
       </p:sp>
       <p:sp>
         <p:nvSpPr>
-          <p:cNvPr id="13" name="Rectangle 12"/>
+          <p:cNvPr id="15" name="Rectangle 14"/>
           <p:cNvSpPr/>
           <p:nvPr/>
         </p:nvSpPr>
@@ -4598,7 +4754,7 @@
       </p:sp>
       <p:sp>
         <p:nvSpPr>
-          <p:cNvPr id="14" name="TextBox 13"/>
+          <p:cNvPr id="16" name="TextBox 15"/>
           <p:cNvSpPr txBox="1"/>
           <p:nvPr/>
         </p:nvSpPr>
@@ -4637,7 +4793,7 @@
       </p:sp>
       <p:sp>
         <p:nvSpPr>
-          <p:cNvPr id="15" name="Rectangle 14"/>
+          <p:cNvPr id="17" name="Rectangle 16"/>
           <p:cNvSpPr/>
           <p:nvPr/>
         </p:nvSpPr>
@@ -4681,7 +4837,7 @@
       </p:sp>
       <p:sp>
         <p:nvSpPr>
-          <p:cNvPr id="16" name="TextBox 15"/>
+          <p:cNvPr id="18" name="TextBox 17"/>
           <p:cNvSpPr txBox="1"/>
           <p:nvPr/>
         </p:nvSpPr>
@@ -4720,7 +4876,7 @@
       </p:sp>
       <p:sp>
         <p:nvSpPr>
-          <p:cNvPr id="17" name="Rectangle 16"/>
+          <p:cNvPr id="19" name="Rectangle 18"/>
           <p:cNvSpPr/>
           <p:nvPr/>
         </p:nvSpPr>
@@ -4764,7 +4920,7 @@
       </p:sp>
       <p:sp>
         <p:nvSpPr>
-          <p:cNvPr id="18" name="TextBox 17"/>
+          <p:cNvPr id="20" name="TextBox 19"/>
           <p:cNvSpPr txBox="1"/>
           <p:nvPr/>
         </p:nvSpPr>
@@ -4803,7 +4959,7 @@
       </p:sp>
       <p:sp>
         <p:nvSpPr>
-          <p:cNvPr id="19" name="Rectangle 18"/>
+          <p:cNvPr id="21" name="Rectangle 20"/>
           <p:cNvSpPr/>
           <p:nvPr/>
         </p:nvSpPr>
@@ -4847,7 +5003,7 @@
       </p:sp>
       <p:sp>
         <p:nvSpPr>
-          <p:cNvPr id="20" name="TextBox 19"/>
+          <p:cNvPr id="22" name="TextBox 21"/>
           <p:cNvSpPr txBox="1"/>
           <p:nvPr/>
         </p:nvSpPr>
@@ -4886,7 +5042,7 @@
       </p:sp>
       <p:sp>
         <p:nvSpPr>
-          <p:cNvPr id="21" name="Rectangle 20"/>
+          <p:cNvPr id="23" name="Rectangle 22"/>
           <p:cNvSpPr/>
           <p:nvPr/>
         </p:nvSpPr>
@@ -4930,7 +5086,7 @@
       </p:sp>
       <p:sp>
         <p:nvSpPr>
-          <p:cNvPr id="22" name="TextBox 21"/>
+          <p:cNvPr id="24" name="TextBox 23"/>
           <p:cNvSpPr txBox="1"/>
           <p:nvPr/>
         </p:nvSpPr>
@@ -4969,7 +5125,7 @@
       </p:sp>
       <p:sp>
         <p:nvSpPr>
-          <p:cNvPr id="23" name="Rectangle 22"/>
+          <p:cNvPr id="25" name="Rectangle 24"/>
           <p:cNvSpPr/>
           <p:nvPr/>
         </p:nvSpPr>
@@ -5013,7 +5169,7 @@
       </p:sp>
       <p:sp>
         <p:nvSpPr>
-          <p:cNvPr id="24" name="TextBox 23"/>
+          <p:cNvPr id="26" name="TextBox 25"/>
           <p:cNvSpPr txBox="1"/>
           <p:nvPr/>
         </p:nvSpPr>
@@ -5052,7 +5208,7 @@
       </p:sp>
       <p:sp>
         <p:nvSpPr>
-          <p:cNvPr id="25" name="Rectangle 24"/>
+          <p:cNvPr id="27" name="Rectangle 26"/>
           <p:cNvSpPr/>
           <p:nvPr/>
         </p:nvSpPr>
@@ -5096,7 +5252,7 @@
       </p:sp>
       <p:sp>
         <p:nvSpPr>
-          <p:cNvPr id="26" name="TextBox 25"/>
+          <p:cNvPr id="28" name="TextBox 27"/>
           <p:cNvSpPr txBox="1"/>
           <p:nvPr/>
         </p:nvSpPr>
@@ -5135,7 +5291,7 @@
       </p:sp>
       <p:sp>
         <p:nvSpPr>
-          <p:cNvPr id="27" name="Rectangle 26"/>
+          <p:cNvPr id="29" name="Rectangle 28"/>
           <p:cNvSpPr/>
           <p:nvPr/>
         </p:nvSpPr>
@@ -5179,7 +5335,7 @@
       </p:sp>
       <p:sp>
         <p:nvSpPr>
-          <p:cNvPr id="28" name="TextBox 27"/>
+          <p:cNvPr id="30" name="TextBox 29"/>
           <p:cNvSpPr txBox="1"/>
           <p:nvPr/>
         </p:nvSpPr>
@@ -5218,7 +5374,7 @@
       </p:sp>
       <p:sp>
         <p:nvSpPr>
-          <p:cNvPr id="29" name="Rectangle 28"/>
+          <p:cNvPr id="31" name="Rectangle 30"/>
           <p:cNvSpPr/>
           <p:nvPr/>
         </p:nvSpPr>
@@ -5262,7 +5418,7 @@
       </p:sp>
       <p:sp>
         <p:nvSpPr>
-          <p:cNvPr id="30" name="TextBox 29"/>
+          <p:cNvPr id="32" name="TextBox 31"/>
           <p:cNvSpPr txBox="1"/>
           <p:nvPr/>
         </p:nvSpPr>
@@ -5301,7 +5457,7 @@
       </p:sp>
       <p:sp>
         <p:nvSpPr>
-          <p:cNvPr id="31" name="TextBox 30"/>
+          <p:cNvPr id="33" name="TextBox 32"/>
           <p:cNvSpPr txBox="1"/>
           <p:nvPr/>
         </p:nvSpPr>
@@ -5340,7 +5496,7 @@
       </p:sp>
       <p:sp>
         <p:nvSpPr>
-          <p:cNvPr id="32" name="Rectangle 31"/>
+          <p:cNvPr id="34" name="Rectangle 33"/>
           <p:cNvSpPr/>
           <p:nvPr/>
         </p:nvSpPr>
@@ -5384,7 +5540,7 @@
       </p:sp>
       <p:sp>
         <p:nvSpPr>
-          <p:cNvPr id="33" name="TextBox 32"/>
+          <p:cNvPr id="35" name="TextBox 34"/>
           <p:cNvSpPr txBox="1"/>
           <p:nvPr/>
         </p:nvSpPr>
@@ -5423,7 +5579,7 @@
       </p:sp>
       <p:sp>
         <p:nvSpPr>
-          <p:cNvPr id="34" name="TextBox 33"/>
+          <p:cNvPr id="36" name="TextBox 35"/>
           <p:cNvSpPr txBox="1"/>
           <p:nvPr/>
         </p:nvSpPr>
@@ -5524,7 +5680,7 @@
       </p:sp>
       <p:pic>
         <p:nvPicPr>
-          <p:cNvPr id="3" name="Picture 2" descr="logo.png"/>
+          <p:cNvPr id="3" name="Picture 2" descr="bottiglie.png"/>
           <p:cNvPicPr>
             <a:picLocks noChangeAspect="1"/>
           </p:cNvPicPr>
@@ -5538,8 +5694,8 @@
         </p:blipFill>
         <p:spPr>
           <a:xfrm>
-            <a:off x="4205287" y="914400"/>
-            <a:ext cx="1876425" cy="1600200"/>
+            <a:off x="5143500" y="914400"/>
+            <a:ext cx="1209675" cy="1428750"/>
           </a:xfrm>
           <a:prstGeom prst="rect">
             <a:avLst/>
@@ -5549,6 +5705,84 @@
       <p:sp>
         <p:nvSpPr>
           <p:cNvPr id="4" name="TextBox 3"/>
+          <p:cNvSpPr txBox="1"/>
+          <p:nvPr/>
+        </p:nvSpPr>
+        <p:spPr>
+          <a:xfrm>
+            <a:off x="4170997" y="2533650"/>
+            <a:ext cx="3154680" cy="480060"/>
+          </a:xfrm>
+          <a:prstGeom prst="rect">
+            <a:avLst/>
+          </a:prstGeom>
+          <a:noFill/>
+        </p:spPr>
+        <p:txBody>
+          <a:bodyPr wrap="square" lIns="0" rIns="0" tIns="0" bIns="0" anchor="t">
+            <a:spAutoFit/>
+          </a:bodyPr>
+          <a:lstStyle/>
+          <a:p>
+            <a:pPr algn="ctr">
+              <a:lnSpc>
+                <a:spcPct val="105000"/>
+              </a:lnSpc>
+            </a:pPr>
+            <a:r>
+              <a:rPr sz="2700" b="1" i="0">
+                <a:solidFill>
+                  <a:srgbClr val="4A4A52"/>
+                </a:solidFill>
+                <a:latin typeface="Montserrat"/>
+              </a:rPr>
+              <a:t>Mignon Experience</a:t>
+            </a:r>
+          </a:p>
+        </p:txBody>
+      </p:sp>
+      <p:sp>
+        <p:nvSpPr>
+          <p:cNvPr id="5" name="TextBox 4"/>
+          <p:cNvSpPr txBox="1"/>
+          <p:nvPr/>
+        </p:nvSpPr>
+        <p:spPr>
+          <a:xfrm>
+            <a:off x="4170997" y="2996565"/>
+            <a:ext cx="3154680" cy="285750"/>
+          </a:xfrm>
+          <a:prstGeom prst="rect">
+            <a:avLst/>
+          </a:prstGeom>
+          <a:noFill/>
+        </p:spPr>
+        <p:txBody>
+          <a:bodyPr wrap="square" lIns="0" rIns="0" tIns="0" bIns="0" anchor="t">
+            <a:spAutoFit/>
+          </a:bodyPr>
+          <a:lstStyle/>
+          <a:p>
+            <a:pPr algn="ctr">
+              <a:lnSpc>
+                <a:spcPct val="125000"/>
+              </a:lnSpc>
+            </a:pPr>
+            <a:r>
+              <a:rPr sz="1125" b="0" i="0" spc="337">
+                <a:solidFill>
+                  <a:srgbClr val="8A8A92"/>
+                </a:solidFill>
+                <a:latin typeface="Montserrat"/>
+              </a:rPr>
+              <a:t>LE PIÙ PICCOLE</a:t>
+            </a:r>
+          </a:p>
+        </p:txBody>
+      </p:sp>
+      <p:sp>
+        <p:nvSpPr>
+          <p:cNvPr id="6" name="TextBox 5"/>
           <p:cNvSpPr txBox="1"/>
           <p:nvPr/>
         </p:nvSpPr>
@@ -5603,7 +5837,7 @@
       </p:sp>
       <p:sp>
         <p:nvSpPr>
-          <p:cNvPr id="5" name="Rectangle 4"/>
+          <p:cNvPr id="7" name="Rectangle 6"/>
           <p:cNvSpPr/>
           <p:nvPr/>
         </p:nvSpPr>
@@ -5647,7 +5881,7 @@
       </p:sp>
       <p:sp>
         <p:nvSpPr>
-          <p:cNvPr id="6" name="TextBox 5"/>
+          <p:cNvPr id="8" name="TextBox 7"/>
           <p:cNvSpPr txBox="1"/>
           <p:nvPr/>
         </p:nvSpPr>
@@ -5686,7 +5920,7 @@
       </p:sp>
       <p:sp>
         <p:nvSpPr>
-          <p:cNvPr id="7" name="TextBox 6"/>
+          <p:cNvPr id="9" name="TextBox 8"/>
           <p:cNvSpPr txBox="1"/>
           <p:nvPr/>
         </p:nvSpPr>
@@ -5725,7 +5959,7 @@
       </p:sp>
       <p:sp>
         <p:nvSpPr>
-          <p:cNvPr id="8" name="TextBox 7"/>
+          <p:cNvPr id="10" name="TextBox 9"/>
           <p:cNvSpPr txBox="1"/>
           <p:nvPr/>
         </p:nvSpPr>
@@ -6002,7 +6236,7 @@
         <p:spPr>
           <a:xfrm>
             <a:off x="1262062" y="3429000"/>
-            <a:ext cx="95250" cy="438150"/>
+            <a:ext cx="57150" cy="438150"/>
           </a:xfrm>
           <a:prstGeom prst="rect">
             <a:avLst/>
@@ -6216,7 +6450,7 @@
         <p:spPr>
           <a:xfrm>
             <a:off x="4329112" y="3429000"/>
-            <a:ext cx="95250" cy="438150"/>
+            <a:ext cx="76200" cy="438150"/>
           </a:xfrm>
           <a:prstGeom prst="rect">
             <a:avLst/>
@@ -6430,7 +6664,7 @@
         <p:spPr>
           <a:xfrm>
             <a:off x="7396162" y="3429000"/>
-            <a:ext cx="95250" cy="438150"/>
+            <a:ext cx="66675" cy="438150"/>
           </a:xfrm>
           <a:prstGeom prst="rect">
             <a:avLst/>
@@ -6537,7 +6771,7 @@
         <p:spPr>
           <a:xfrm>
             <a:off x="8929687" y="3429000"/>
-            <a:ext cx="95250" cy="438150"/>
+            <a:ext cx="57150" cy="438150"/>
           </a:xfrm>
           <a:prstGeom prst="rect">
             <a:avLst/>
@@ -6751,7 +6985,7 @@
         <p:spPr>
           <a:xfrm>
             <a:off x="2795587" y="4962525"/>
-            <a:ext cx="95250" cy="438150"/>
+            <a:ext cx="76200" cy="438150"/>
           </a:xfrm>
           <a:prstGeom prst="rect">
             <a:avLst/>
@@ -6858,7 +7092,7 @@
         <p:spPr>
           <a:xfrm>
             <a:off x="4329112" y="4962525"/>
-            <a:ext cx="95250" cy="438150"/>
+            <a:ext cx="57150" cy="438150"/>
           </a:xfrm>
           <a:prstGeom prst="rect">
             <a:avLst/>
@@ -7072,7 +7306,7 @@
         <p:spPr>
           <a:xfrm>
             <a:off x="7396162" y="4962525"/>
-            <a:ext cx="95250" cy="438150"/>
+            <a:ext cx="66675" cy="438150"/>
           </a:xfrm>
           <a:prstGeom prst="rect">
             <a:avLst/>
@@ -7179,7 +7413,7 @@
         <p:spPr>
           <a:xfrm>
             <a:off x="8929687" y="4962525"/>
-            <a:ext cx="95250" cy="438150"/>
+            <a:ext cx="76200" cy="438150"/>
           </a:xfrm>
           <a:prstGeom prst="rect">
             <a:avLst/>
@@ -7286,7 +7520,7 @@
         <p:spPr>
           <a:xfrm>
             <a:off x="1262062" y="6496050"/>
-            <a:ext cx="95250" cy="438150"/>
+            <a:ext cx="57150" cy="438150"/>
           </a:xfrm>
           <a:prstGeom prst="rect">
             <a:avLst/>
@@ -7500,7 +7734,7 @@
         <p:spPr>
           <a:xfrm>
             <a:off x="4329112" y="6496050"/>
-            <a:ext cx="95250" cy="438150"/>
+            <a:ext cx="76200" cy="438150"/>
           </a:xfrm>
           <a:prstGeom prst="rect">
             <a:avLst/>
@@ -7607,7 +7841,7 @@
         <p:spPr>
           <a:xfrm>
             <a:off x="5862637" y="6496050"/>
-            <a:ext cx="95250" cy="438150"/>
+            <a:ext cx="66675" cy="438150"/>
           </a:xfrm>
           <a:prstGeom prst="rect">
             <a:avLst/>
@@ -7821,7 +8055,7 @@
         <p:spPr>
           <a:xfrm>
             <a:off x="8929687" y="6496050"/>
-            <a:ext cx="95250" cy="438150"/>
+            <a:ext cx="57150" cy="438150"/>
           </a:xfrm>
           <a:prstGeom prst="rect">
             <a:avLst/>
@@ -7928,7 +8162,7 @@
         <p:spPr>
           <a:xfrm>
             <a:off x="1262062" y="8029575"/>
-            <a:ext cx="95250" cy="438150"/>
+            <a:ext cx="76200" cy="438150"/>
           </a:xfrm>
           <a:prstGeom prst="rect">
             <a:avLst/>
@@ -8142,7 +8376,7 @@
         <p:spPr>
           <a:xfrm>
             <a:off x="4329112" y="8029575"/>
-            <a:ext cx="95250" cy="438150"/>
+            <a:ext cx="66675" cy="438150"/>
           </a:xfrm>
           <a:prstGeom prst="rect">
             <a:avLst/>
@@ -8249,7 +8483,7 @@
         <p:spPr>
           <a:xfrm>
             <a:off x="5862637" y="8029575"/>
-            <a:ext cx="95250" cy="438150"/>
+            <a:ext cx="57150" cy="438150"/>
           </a:xfrm>
           <a:prstGeom prst="rect">
             <a:avLst/>
@@ -10183,7 +10417,7 @@
         <p:spPr>
           <a:xfrm>
             <a:off x="4667250" y="4000500"/>
-            <a:ext cx="247650" cy="1143000"/>
+            <a:ext cx="152400" cy="1143000"/>
           </a:xfrm>
           <a:prstGeom prst="rect">
             <a:avLst/>
@@ -10231,7 +10465,7 @@
         <p:spPr>
           <a:xfrm>
             <a:off x="5429250" y="4000500"/>
-            <a:ext cx="238125" cy="1143000"/>
+            <a:ext cx="209550" cy="1143000"/>
           </a:xfrm>
           <a:prstGeom prst="rect">
             <a:avLst/>
@@ -10416,7 +10650,7 @@
         <p:spPr>
           <a:xfrm>
             <a:off x="7696200" y="4000500"/>
-            <a:ext cx="247650" cy="1143000"/>
+            <a:ext cx="171450" cy="1143000"/>
           </a:xfrm>
           <a:prstGeom prst="rect">
             <a:avLst/>
@@ -10440,7 +10674,7 @@
         <p:spPr>
           <a:xfrm>
             <a:off x="8077200" y="4000500"/>
-            <a:ext cx="247650" cy="1143000"/>
+            <a:ext cx="152400" cy="1143000"/>
           </a:xfrm>
           <a:prstGeom prst="rect">
             <a:avLst/>
@@ -11841,7 +12075,7 @@
         <p:spPr>
           <a:xfrm>
             <a:off x="1476375" y="3429000"/>
-            <a:ext cx="647700" cy="3143250"/>
+            <a:ext cx="657225" cy="3143250"/>
           </a:xfrm>
           <a:prstGeom prst="rect">
             <a:avLst/>
@@ -12538,7 +12772,7 @@
       </p:sp>
       <p:pic>
         <p:nvPicPr>
-          <p:cNvPr id="24" name="Picture 23" descr="logo-chiaro.png"/>
+          <p:cNvPr id="24" name="Picture 23" descr="bottiglie.png"/>
           <p:cNvPicPr>
             <a:picLocks noChangeAspect="1"/>
           </p:cNvPicPr>
@@ -12552,8 +12786,8 @@
         </p:blipFill>
         <p:spPr>
           <a:xfrm>
-            <a:off x="609600" y="11811000"/>
-            <a:ext cx="847725" cy="723900"/>
+            <a:off x="609600" y="11582400"/>
+            <a:ext cx="485775" cy="571500"/>
           </a:xfrm>
           <a:prstGeom prst="rect">
             <a:avLst/>
@@ -12563,6 +12797,84 @@
       <p:sp>
         <p:nvSpPr>
           <p:cNvPr id="25" name="TextBox 24"/>
+          <p:cNvSpPr txBox="1"/>
+          <p:nvPr/>
+        </p:nvSpPr>
+        <p:spPr>
+          <a:xfrm>
+            <a:off x="609600" y="12230100"/>
+            <a:ext cx="1489709" cy="226694"/>
+          </a:xfrm>
+          <a:prstGeom prst="rect">
+            <a:avLst/>
+          </a:prstGeom>
+          <a:noFill/>
+        </p:spPr>
+        <p:txBody>
+          <a:bodyPr wrap="square" lIns="0" rIns="0" tIns="0" bIns="0" anchor="t">
+            <a:spAutoFit/>
+          </a:bodyPr>
+          <a:lstStyle/>
+          <a:p>
+            <a:pPr algn="l">
+              <a:lnSpc>
+                <a:spcPct val="105000"/>
+              </a:lnSpc>
+            </a:pPr>
+            <a:r>
+              <a:rPr sz="1275" b="1" i="0">
+                <a:solidFill>
+                  <a:srgbClr val="F3ECE2"/>
+                </a:solidFill>
+                <a:latin typeface="Montserrat"/>
+              </a:rPr>
+              <a:t>Mignon Experience</a:t>
+            </a:r>
+          </a:p>
+        </p:txBody>
+      </p:sp>
+      <p:sp>
+        <p:nvSpPr>
+          <p:cNvPr id="26" name="TextBox 25"/>
+          <p:cNvSpPr txBox="1"/>
+          <p:nvPr/>
+        </p:nvSpPr>
+        <p:spPr>
+          <a:xfrm>
+            <a:off x="609600" y="12448698"/>
+            <a:ext cx="1489709" cy="152400"/>
+          </a:xfrm>
+          <a:prstGeom prst="rect">
+            <a:avLst/>
+          </a:prstGeom>
+          <a:noFill/>
+        </p:spPr>
+        <p:txBody>
+          <a:bodyPr wrap="square" lIns="0" rIns="0" tIns="0" bIns="0" anchor="t">
+            <a:spAutoFit/>
+          </a:bodyPr>
+          <a:lstStyle/>
+          <a:p>
+            <a:pPr algn="l">
+              <a:lnSpc>
+                <a:spcPct val="125000"/>
+              </a:lnSpc>
+            </a:pPr>
+            <a:r>
+              <a:rPr sz="600" b="0" i="0" spc="179">
+                <a:solidFill>
+                  <a:srgbClr val="A2968A"/>
+                </a:solidFill>
+                <a:latin typeface="Montserrat"/>
+              </a:rPr>
+              <a:t>LE PIÙ PICCOLE</a:t>
+            </a:r>
+          </a:p>
+        </p:txBody>
+      </p:sp>
+      <p:sp>
+        <p:nvSpPr>
+          <p:cNvPr id="27" name="TextBox 26"/>
           <p:cNvSpPr txBox="1"/>
           <p:nvPr/>
         </p:nvSpPr>
